--- a/assets/pptx/catalog-343.pptx
+++ b/assets/pptx/catalog-343.pptx
@@ -3315,7 +3315,7 @@
                 <a:ea typeface="Ebrima"/>
                 <a:cs typeface="Ebrima"/>
               </a:rPr>
-              <a:t>አዝ ለድል እንጂ ለሽንፈት እኔ አልተጠራሁም (2x)</a:t>
+              <a:t>አዝ ለድል እንጂ ለሽንፈት እኔ አልተጠራሁም 2x</a:t>
             </a:r>
           </a:p>
           <a:p>
@@ -3472,7 +3472,7 @@
                 <a:ea typeface="Ebrima"/>
                 <a:cs typeface="Ebrima"/>
               </a:rPr>
-              <a:t>ከእኔ ጋር ስላለ በድፍረት እላለሁ እየሱስ ነው ጌታ (2x)</a:t>
+              <a:t>ከእኔ ጋር ስላለ በድፍረት እላለሁ እየሱስ ነው ጌታ 2x</a:t>
             </a:r>
           </a:p>
           <a:p>
@@ -3611,7 +3611,7 @@
                 <a:ea typeface="Ebrima"/>
                 <a:cs typeface="Ebrima"/>
               </a:rPr>
-              <a:t>አዝ ለድል እንጂ ለሽንፈት እኔ አልተጠራሁም (2x)</a:t>
+              <a:t>አዝ ለድል እንጂ ለሽንፈት እኔ አልተጠራሁም 2x</a:t>
             </a:r>
           </a:p>
           <a:p>
